--- a/content/decks/media-studies/media-studies-s1-lesson-11-audiences-and-the-portfolio-submission.pptx
+++ b/content/decks/media-studies/media-studies-s1-lesson-11-audiences-and-the-portfolio-submission.pptx
@@ -3858,20 +3858,23 @@
         </p:nvSpPr>
         <p:spPr>
           <a:xfrm>
-            <a:off x="822960" y="5349240"/>
-            <a:ext cx="10543032" cy="457200"/>
-          </a:xfrm>
-          <a:prstGeom prst="rect">
-            <a:avLst/>
-          </a:prstGeom>
-          <a:noFill/>
-          <a:ln/>
-        </p:spPr>
-        <p:txBody>
-          <a:bodyPr wrap="square" lIns="0" tIns="0" rIns="0" bIns="0" rtlCol="0" anchor="ctr"/>
+            <a:off x="822960" y="5303520"/>
+            <a:ext cx="10543032" cy="685800"/>
+          </a:xfrm>
+          <a:prstGeom prst="rect">
+            <a:avLst/>
+          </a:prstGeom>
+          <a:noFill/>
+          <a:ln/>
+        </p:spPr>
+        <p:txBody>
+          <a:bodyPr wrap="square" lIns="0" tIns="0" rIns="0" bIns="0" rtlCol="0" anchor="t"/>
           <a:lstStyle/>
           <a:p>
             <a:pPr indent="0" marL="0">
+              <a:lnSpc>
+                <a:spcPts val="1700"/>
+              </a:lnSpc>
               <a:buNone/>
             </a:pPr>
             <a:r>
@@ -3883,7 +3886,7 @@
                 <a:ea typeface="Arial" pitchFamily="34" charset="-122"/>
                 <a:cs typeface="Arial" pitchFamily="34" charset="-120"/>
               </a:rPr>
-              <a:t>Demographics vs psychographics: who they are, versus what they want. Everyone is almost always a wrong answer.</a:t>
+              <a:t>Opened as Four Corners: mass, niche, target, undecided; commit by moving, one corner defends. Demographics vs psychographics: who they are, versus what they want.</a:t>
             </a:r>
             <a:endParaRPr lang="en-US" sz="1250" dirty="0"/>
           </a:p>
@@ -4547,7 +4550,46 @@
       </p:sp>
       <p:sp>
         <p:nvSpPr>
-          <p:cNvPr id="12" name="Shape 10"/>
+          <p:cNvPr id="12" name="Text 10"/>
+          <p:cNvSpPr/>
+          <p:nvPr/>
+        </p:nvSpPr>
+        <p:spPr>
+          <a:xfrm>
+            <a:off x="822960" y="5349240"/>
+            <a:ext cx="10543032" cy="365760"/>
+          </a:xfrm>
+          <a:prstGeom prst="rect">
+            <a:avLst/>
+          </a:prstGeom>
+          <a:noFill/>
+          <a:ln/>
+        </p:spPr>
+        <p:txBody>
+          <a:bodyPr wrap="square" lIns="0" tIns="0" rIns="0" bIns="0" rtlCol="0" anchor="ctr"/>
+          <a:lstStyle/>
+          <a:p>
+            <a:pPr indent="0" marL="0">
+              <a:buNone/>
+            </a:pPr>
+            <a:r>
+              <a:rPr lang="en-US" sz="1250" i="1" dirty="0">
+                <a:solidFill>
+                  <a:srgbClr val="7A7F72"/>
+                </a:solidFill>
+                <a:latin typeface="Arial" pitchFamily="34" charset="0"/>
+                <a:ea typeface="Arial" pitchFamily="34" charset="-122"/>
+                <a:cs typeface="Arial" pitchFamily="34" charset="-120"/>
+              </a:rPr>
+              <a:t>The counter-evidence log runs on myth-busting points: an example that survives the room's challenge scores.</a:t>
+            </a:r>
+            <a:endParaRPr lang="en-US" sz="1250" dirty="0"/>
+          </a:p>
+        </p:txBody>
+      </p:sp>
+      <p:sp>
+        <p:nvSpPr>
+          <p:cNvPr id="13" name="Shape 11"/>
           <p:cNvSpPr/>
           <p:nvPr/>
         </p:nvSpPr>
@@ -4570,7 +4612,7 @@
       </p:sp>
       <p:sp>
         <p:nvSpPr>
-          <p:cNvPr id="13" name="Text 11"/>
+          <p:cNvPr id="14" name="Text 12"/>
           <p:cNvSpPr/>
           <p:nvPr/>
         </p:nvSpPr>
@@ -4609,7 +4651,7 @@
       </p:sp>
       <p:sp>
         <p:nvSpPr>
-          <p:cNvPr id="14" name="Text 12"/>
+          <p:cNvPr id="15" name="Text 13"/>
           <p:cNvSpPr/>
           <p:nvPr/>
         </p:nvSpPr>
@@ -5426,7 +5468,7 @@
       </p:grpSpPr>
       <p:pic>
         <p:nvPicPr>
-          <p:cNvPr id="2" name="Image 0" descr="/private/tmp/claude-501/-Users-dogan-Documents-Vaults-Courses/a3a5132d-721f-4cd4-8ddd-e62e2b37b51b/scratchpad/img/crops/daumier-drama_a1777.jpg">    </p:cNvPr>
+          <p:cNvPr id="2" name="Image 0" descr="/Users/dogan/Documents/Vaults/Courses/wiki/classes/media-studies/decks/_build/img/crops/daumier-drama_a1777.jpg">    </p:cNvPr>
           <p:cNvPicPr>
             <a:picLocks noChangeAspect="1"/>
           </p:cNvPicPr>
@@ -5665,7 +5707,7 @@
       </p:grpSpPr>
       <p:pic>
         <p:nvPicPr>
-          <p:cNvPr id="2" name="Image 0" descr="/private/tmp/claude-501/-Users-dogan-Documents-Vaults-Courses/a3a5132d-721f-4cd4-8ddd-e62e2b37b51b/scratchpad/img/crops/manet-good-beer_a664.jpg">    </p:cNvPr>
+          <p:cNvPr id="2" name="Image 0" descr="/Users/dogan/Documents/Vaults/Courses/wiki/classes/media-studies/decks/_build/img/crops/manet-good-beer_a664.jpg">    </p:cNvPr>
           <p:cNvPicPr>
             <a:picLocks noChangeAspect="1"/>
           </p:cNvPicPr>
@@ -5888,7 +5930,7 @@
                 <a:ea typeface="Georgia" pitchFamily="34" charset="-122"/>
                 <a:cs typeface="Georgia" pitchFamily="34" charset="-120"/>
               </a:rPr>
-              <a:t>A man, a beer, an evening of diversion: gratification made visible. Map your real weekly media use onto the four gratifications, the L01 log now theorized. The honesty rule is absolute: the comfort re-watch and the 2 a.m. scroll are data, not confessions. Which gratification does your own C1 product serve, and how would you know?</a:t>
+              <a:t>A man, a beer, an evening off. Diversion, painted in 1873. Map your real weekly media use onto the four gratifications, the L01 log with a theory attached. The honesty rule is absolute: the comfort re-watch and the 2 a.m. scroll are data, not confessions. Which gratification does your own C1 product serve, and how would you know?</a:t>
             </a:r>
             <a:endParaRPr lang="en-US" sz="1650" dirty="0"/>
           </a:p>
